--- a/演示文稿1.pptx
+++ b/演示文稿1.pptx
@@ -4463,7 +4463,7 @@
         </p:nvSpPr>
         <p:spPr>
           <a:xfrm>
-            <a:off x="2962274" y="4595678"/>
+            <a:off x="3076575" y="5338967"/>
             <a:ext cx="5235572" cy="458583"/>
           </a:xfrm>
           <a:prstGeom prst="rect">
@@ -5385,6 +5385,246 @@
           </a:p>
         </p:txBody>
       </p:sp>
+      <p:sp>
+        <p:nvSpPr>
+          <p:cNvPr id="64" name="矩形 63">
+            <a:extLst>
+              <a:ext uri="{FF2B5EF4-FFF2-40B4-BE49-F238E27FC236}">
+                <a16:creationId xmlns:a16="http://schemas.microsoft.com/office/drawing/2014/main" id="{9ABFDCA7-FCA7-912B-756B-0F2E461EFB59}"/>
+              </a:ext>
+            </a:extLst>
+          </p:cNvPr>
+          <p:cNvSpPr/>
+          <p:nvPr/>
+        </p:nvSpPr>
+        <p:spPr>
+          <a:xfrm>
+            <a:off x="364368" y="4384890"/>
+            <a:ext cx="4635497" cy="661059"/>
+          </a:xfrm>
+          <a:prstGeom prst="rect">
+            <a:avLst/>
+          </a:prstGeom>
+          <a:solidFill>
+            <a:schemeClr val="accent2">
+              <a:lumMod val="40000"/>
+              <a:lumOff val="60000"/>
+            </a:schemeClr>
+          </a:solidFill>
+          <a:ln>
+            <a:noFill/>
+          </a:ln>
+        </p:spPr>
+        <p:style>
+          <a:lnRef idx="2">
+            <a:schemeClr val="accent1">
+              <a:shade val="15000"/>
+            </a:schemeClr>
+          </a:lnRef>
+          <a:fillRef idx="1">
+            <a:schemeClr val="accent1"/>
+          </a:fillRef>
+          <a:effectRef idx="0">
+            <a:schemeClr val="accent1"/>
+          </a:effectRef>
+          <a:fontRef idx="minor">
+            <a:schemeClr val="lt1"/>
+          </a:fontRef>
+        </p:style>
+        <p:txBody>
+          <a:bodyPr rtlCol="0" anchor="ctr"/>
+          <a:lstStyle/>
+          <a:p>
+            <a:pPr algn="ctr"/>
+            <a:r>
+              <a:rPr lang="zh-CN" altLang="en-US" sz="1400" dirty="0">
+                <a:solidFill>
+                  <a:schemeClr val="tx1"/>
+                </a:solidFill>
+                <a:latin typeface="Times New Roman" panose="02020603050405020304" pitchFamily="18" charset="0"/>
+                <a:cs typeface="Times New Roman" panose="02020603050405020304" pitchFamily="18" charset="0"/>
+              </a:rPr>
+              <a:t>对列表中的内存</a:t>
+            </a:r>
+            <a:r>
+              <a:rPr lang="en-US" altLang="zh-CN" sz="1400" dirty="0">
+                <a:solidFill>
+                  <a:schemeClr val="tx1"/>
+                </a:solidFill>
+                <a:latin typeface="Times New Roman" panose="02020603050405020304" pitchFamily="18" charset="0"/>
+                <a:cs typeface="Times New Roman" panose="02020603050405020304" pitchFamily="18" charset="0"/>
+              </a:rPr>
+              <a:t>:</a:t>
+            </a:r>
+          </a:p>
+          <a:p>
+            <a:pPr algn="ctr"/>
+            <a:r>
+              <a:rPr lang="en" altLang="zh-CN" sz="1400" dirty="0" err="1">
+                <a:solidFill>
+                  <a:schemeClr val="tx1"/>
+                </a:solidFill>
+                <a:latin typeface="Times New Roman" panose="02020603050405020304" pitchFamily="18" charset="0"/>
+                <a:cs typeface="Times New Roman" panose="02020603050405020304" pitchFamily="18" charset="0"/>
+              </a:rPr>
+              <a:t>removeMemoryBuffer</a:t>
+            </a:r>
+            <a:r>
+              <a:rPr lang="en" altLang="zh-CN" sz="1400" dirty="0">
+                <a:solidFill>
+                  <a:schemeClr val="tx1"/>
+                </a:solidFill>
+                <a:latin typeface="Times New Roman" panose="02020603050405020304" pitchFamily="18" charset="0"/>
+                <a:cs typeface="Times New Roman" panose="02020603050405020304" pitchFamily="18" charset="0"/>
+              </a:rPr>
+              <a:t>(desc0</a:t>
+            </a:r>
+            <a:r>
+              <a:rPr lang="en-US" altLang="zh-CN" sz="1400" dirty="0">
+                <a:solidFill>
+                  <a:schemeClr val="tx1"/>
+                </a:solidFill>
+                <a:latin typeface="Times New Roman" panose="02020603050405020304" pitchFamily="18" charset="0"/>
+                <a:cs typeface="Times New Roman" panose="02020603050405020304" pitchFamily="18" charset="0"/>
+              </a:rPr>
+              <a:t>,desc1…</a:t>
+            </a:r>
+            <a:r>
+              <a:rPr lang="en" altLang="zh-CN" sz="1400" dirty="0">
+                <a:solidFill>
+                  <a:schemeClr val="tx1"/>
+                </a:solidFill>
+                <a:latin typeface="Times New Roman" panose="02020603050405020304" pitchFamily="18" charset="0"/>
+                <a:cs typeface="Times New Roman" panose="02020603050405020304" pitchFamily="18" charset="0"/>
+              </a:rPr>
+              <a:t>) → </a:t>
+            </a:r>
+            <a:r>
+              <a:rPr lang="en" altLang="zh-CN" sz="1400" dirty="0" err="1">
+                <a:solidFill>
+                  <a:schemeClr val="tx1"/>
+                </a:solidFill>
+                <a:latin typeface="Times New Roman" panose="02020603050405020304" pitchFamily="18" charset="0"/>
+                <a:cs typeface="Times New Roman" panose="02020603050405020304" pitchFamily="18" charset="0"/>
+              </a:rPr>
+              <a:t>hixl</a:t>
+            </a:r>
+            <a:r>
+              <a:rPr lang="en" altLang="zh-CN" sz="1400" dirty="0">
+                <a:solidFill>
+                  <a:schemeClr val="tx1"/>
+                </a:solidFill>
+                <a:latin typeface="Times New Roman" panose="02020603050405020304" pitchFamily="18" charset="0"/>
+                <a:cs typeface="Times New Roman" panose="02020603050405020304" pitchFamily="18" charset="0"/>
+              </a:rPr>
+              <a:t>_-&gt;</a:t>
+            </a:r>
+            <a:r>
+              <a:rPr lang="en" altLang="zh-CN" sz="1400" dirty="0" err="1">
+                <a:solidFill>
+                  <a:schemeClr val="tx1"/>
+                </a:solidFill>
+                <a:latin typeface="Times New Roman" panose="02020603050405020304" pitchFamily="18" charset="0"/>
+                <a:cs typeface="Times New Roman" panose="02020603050405020304" pitchFamily="18" charset="0"/>
+              </a:rPr>
+              <a:t>RegisterMem</a:t>
+            </a:r>
+            <a:r>
+              <a:rPr lang="en-US" altLang="zh-CN" sz="1400" dirty="0">
+                <a:solidFill>
+                  <a:schemeClr val="tx1"/>
+                </a:solidFill>
+                <a:latin typeface="Times New Roman" panose="02020603050405020304" pitchFamily="18" charset="0"/>
+                <a:cs typeface="Times New Roman" panose="02020603050405020304" pitchFamily="18" charset="0"/>
+              </a:rPr>
+              <a:t>, </a:t>
+            </a:r>
+            <a:r>
+              <a:rPr lang="zh-CN" altLang="en-US" sz="1400" dirty="0">
+                <a:solidFill>
+                  <a:schemeClr val="tx1"/>
+                </a:solidFill>
+                <a:latin typeface="Times New Roman" panose="02020603050405020304" pitchFamily="18" charset="0"/>
+                <a:cs typeface="Times New Roman" panose="02020603050405020304" pitchFamily="18" charset="0"/>
+              </a:rPr>
+              <a:t>断开所有连接</a:t>
+            </a:r>
+            <a:r>
+              <a:rPr lang="en-US" altLang="zh-CN" sz="1400" dirty="0">
+                <a:solidFill>
+                  <a:schemeClr val="tx1"/>
+                </a:solidFill>
+                <a:latin typeface="Times New Roman" panose="02020603050405020304" pitchFamily="18" charset="0"/>
+                <a:cs typeface="Times New Roman" panose="02020603050405020304" pitchFamily="18" charset="0"/>
+              </a:rPr>
+              <a:t>,</a:t>
+            </a:r>
+            <a:r>
+              <a:rPr lang="zh-CN" altLang="en-US" sz="1400" dirty="0">
+                <a:solidFill>
+                  <a:schemeClr val="tx1"/>
+                </a:solidFill>
+                <a:latin typeface="Times New Roman" panose="02020603050405020304" pitchFamily="18" charset="0"/>
+                <a:cs typeface="Times New Roman" panose="02020603050405020304" pitchFamily="18" charset="0"/>
+              </a:rPr>
+              <a:t> 清楚缓存映射</a:t>
+            </a:r>
+            <a:endParaRPr lang="en" altLang="zh-CN" sz="1400" dirty="0">
+              <a:solidFill>
+                <a:schemeClr val="tx1"/>
+              </a:solidFill>
+              <a:latin typeface="Times New Roman" panose="02020603050405020304" pitchFamily="18" charset="0"/>
+              <a:cs typeface="Times New Roman" panose="02020603050405020304" pitchFamily="18" charset="0"/>
+            </a:endParaRPr>
+          </a:p>
+        </p:txBody>
+      </p:sp>
+      <p:cxnSp>
+        <p:nvCxnSpPr>
+          <p:cNvPr id="66" name="直线箭头连接符 65">
+            <a:extLst>
+              <a:ext uri="{FF2B5EF4-FFF2-40B4-BE49-F238E27FC236}">
+                <a16:creationId xmlns:a16="http://schemas.microsoft.com/office/drawing/2014/main" id="{B69CE112-A943-1FAC-4204-5700C395E548}"/>
+              </a:ext>
+            </a:extLst>
+          </p:cNvPr>
+          <p:cNvCxnSpPr>
+            <a:stCxn id="20" idx="2"/>
+            <a:endCxn id="64" idx="0"/>
+          </p:cNvCxnSpPr>
+          <p:nvPr/>
+        </p:nvCxnSpPr>
+        <p:spPr>
+          <a:xfrm flipH="1">
+            <a:off x="2682117" y="3615591"/>
+            <a:ext cx="2159758" cy="769299"/>
+          </a:xfrm>
+          <a:prstGeom prst="straightConnector1">
+            <a:avLst/>
+          </a:prstGeom>
+          <a:ln>
+            <a:solidFill>
+              <a:schemeClr val="tx1"/>
+            </a:solidFill>
+            <a:prstDash val="sysDot"/>
+            <a:tailEnd type="triangle"/>
+          </a:ln>
+        </p:spPr>
+        <p:style>
+          <a:lnRef idx="2">
+            <a:schemeClr val="accent1"/>
+          </a:lnRef>
+          <a:fillRef idx="0">
+            <a:schemeClr val="accent1"/>
+          </a:fillRef>
+          <a:effectRef idx="1">
+            <a:schemeClr val="accent1"/>
+          </a:effectRef>
+          <a:fontRef idx="minor">
+            <a:schemeClr val="tx1"/>
+          </a:fontRef>
+        </p:style>
+      </p:cxnSp>
     </p:spTree>
     <p:extLst>
       <p:ext uri="{BB962C8B-B14F-4D97-AF65-F5344CB8AC3E}">

--- a/演示文稿1.pptx
+++ b/演示文稿1.pptx
@@ -105,6 +105,11 @@
       </a:defRPr>
     </a:lvl9pPr>
   </p:defaultTextStyle>
+  <p:extLst>
+    <p:ext uri="{EFAFB233-063F-42B5-8137-9DF3F51BA10A}">
+      <p15:sldGuideLst xmlns:p15="http://schemas.microsoft.com/office/powerpoint/2012/main"/>
+    </p:ext>
+  </p:extLst>
 </p:presentation>
 </file>
 
@@ -255,7 +260,7 @@
           <a:p>
             <a:fld id="{5509704B-8FD3-BA4C-AD8C-FF356015920E}" type="datetimeFigureOut">
               <a:rPr kumimoji="1" lang="zh-CN" altLang="en-US" smtClean="0"/>
-              <a:t>2026/6/28</a:t>
+              <a:t>2026/6/29</a:t>
             </a:fld>
             <a:endParaRPr kumimoji="1" lang="zh-CN" altLang="en-US"/>
           </a:p>
@@ -453,7 +458,7 @@
           <a:p>
             <a:fld id="{5509704B-8FD3-BA4C-AD8C-FF356015920E}" type="datetimeFigureOut">
               <a:rPr kumimoji="1" lang="zh-CN" altLang="en-US" smtClean="0"/>
-              <a:t>2026/6/28</a:t>
+              <a:t>2026/6/29</a:t>
             </a:fld>
             <a:endParaRPr kumimoji="1" lang="zh-CN" altLang="en-US"/>
           </a:p>
@@ -661,7 +666,7 @@
           <a:p>
             <a:fld id="{5509704B-8FD3-BA4C-AD8C-FF356015920E}" type="datetimeFigureOut">
               <a:rPr kumimoji="1" lang="zh-CN" altLang="en-US" smtClean="0"/>
-              <a:t>2026/6/28</a:t>
+              <a:t>2026/6/29</a:t>
             </a:fld>
             <a:endParaRPr kumimoji="1" lang="zh-CN" altLang="en-US"/>
           </a:p>
@@ -859,7 +864,7 @@
           <a:p>
             <a:fld id="{5509704B-8FD3-BA4C-AD8C-FF356015920E}" type="datetimeFigureOut">
               <a:rPr kumimoji="1" lang="zh-CN" altLang="en-US" smtClean="0"/>
-              <a:t>2026/6/28</a:t>
+              <a:t>2026/6/29</a:t>
             </a:fld>
             <a:endParaRPr kumimoji="1" lang="zh-CN" altLang="en-US"/>
           </a:p>
@@ -1134,7 +1139,7 @@
           <a:p>
             <a:fld id="{5509704B-8FD3-BA4C-AD8C-FF356015920E}" type="datetimeFigureOut">
               <a:rPr kumimoji="1" lang="zh-CN" altLang="en-US" smtClean="0"/>
-              <a:t>2026/6/28</a:t>
+              <a:t>2026/6/29</a:t>
             </a:fld>
             <a:endParaRPr kumimoji="1" lang="zh-CN" altLang="en-US"/>
           </a:p>
@@ -1399,7 +1404,7 @@
           <a:p>
             <a:fld id="{5509704B-8FD3-BA4C-AD8C-FF356015920E}" type="datetimeFigureOut">
               <a:rPr kumimoji="1" lang="zh-CN" altLang="en-US" smtClean="0"/>
-              <a:t>2026/6/28</a:t>
+              <a:t>2026/6/29</a:t>
             </a:fld>
             <a:endParaRPr kumimoji="1" lang="zh-CN" altLang="en-US"/>
           </a:p>
@@ -1811,7 +1816,7 @@
           <a:p>
             <a:fld id="{5509704B-8FD3-BA4C-AD8C-FF356015920E}" type="datetimeFigureOut">
               <a:rPr kumimoji="1" lang="zh-CN" altLang="en-US" smtClean="0"/>
-              <a:t>2026/6/28</a:t>
+              <a:t>2026/6/29</a:t>
             </a:fld>
             <a:endParaRPr kumimoji="1" lang="zh-CN" altLang="en-US"/>
           </a:p>
@@ -1952,7 +1957,7 @@
           <a:p>
             <a:fld id="{5509704B-8FD3-BA4C-AD8C-FF356015920E}" type="datetimeFigureOut">
               <a:rPr kumimoji="1" lang="zh-CN" altLang="en-US" smtClean="0"/>
-              <a:t>2026/6/28</a:t>
+              <a:t>2026/6/29</a:t>
             </a:fld>
             <a:endParaRPr kumimoji="1" lang="zh-CN" altLang="en-US"/>
           </a:p>
@@ -2065,7 +2070,7 @@
           <a:p>
             <a:fld id="{5509704B-8FD3-BA4C-AD8C-FF356015920E}" type="datetimeFigureOut">
               <a:rPr kumimoji="1" lang="zh-CN" altLang="en-US" smtClean="0"/>
-              <a:t>2026/6/28</a:t>
+              <a:t>2026/6/29</a:t>
             </a:fld>
             <a:endParaRPr kumimoji="1" lang="zh-CN" altLang="en-US"/>
           </a:p>
@@ -2376,7 +2381,7 @@
           <a:p>
             <a:fld id="{5509704B-8FD3-BA4C-AD8C-FF356015920E}" type="datetimeFigureOut">
               <a:rPr kumimoji="1" lang="zh-CN" altLang="en-US" smtClean="0"/>
-              <a:t>2026/6/28</a:t>
+              <a:t>2026/6/29</a:t>
             </a:fld>
             <a:endParaRPr kumimoji="1" lang="zh-CN" altLang="en-US"/>
           </a:p>
@@ -2664,7 +2669,7 @@
           <a:p>
             <a:fld id="{5509704B-8FD3-BA4C-AD8C-FF356015920E}" type="datetimeFigureOut">
               <a:rPr kumimoji="1" lang="zh-CN" altLang="en-US" smtClean="0"/>
-              <a:t>2026/6/28</a:t>
+              <a:t>2026/6/29</a:t>
             </a:fld>
             <a:endParaRPr kumimoji="1" lang="zh-CN" altLang="en-US"/>
           </a:p>
@@ -2905,7 +2910,7 @@
           <a:p>
             <a:fld id="{5509704B-8FD3-BA4C-AD8C-FF356015920E}" type="datetimeFigureOut">
               <a:rPr kumimoji="1" lang="zh-CN" altLang="en-US" smtClean="0"/>
-              <a:t>2026/6/28</a:t>
+              <a:t>2026/6/29</a:t>
             </a:fld>
             <a:endParaRPr kumimoji="1" lang="zh-CN" altLang="en-US"/>
           </a:p>
@@ -4171,6 +4176,84 @@
           </a:p>
         </p:txBody>
       </p:sp>
+      <p:cxnSp>
+        <p:nvCxnSpPr>
+          <p:cNvPr id="3" name="直线连接符 2">
+            <a:extLst>
+              <a:ext uri="{FF2B5EF4-FFF2-40B4-BE49-F238E27FC236}">
+                <a16:creationId xmlns:a16="http://schemas.microsoft.com/office/drawing/2014/main" id="{D4745B83-6AD2-3C21-D5B8-910F3BE82C58}"/>
+              </a:ext>
+            </a:extLst>
+          </p:cNvPr>
+          <p:cNvCxnSpPr>
+            <a:stCxn id="4" idx="2"/>
+            <a:endCxn id="6" idx="0"/>
+          </p:cNvCxnSpPr>
+          <p:nvPr/>
+        </p:nvCxnSpPr>
+        <p:spPr>
+          <a:xfrm>
+            <a:off x="2445489" y="2062716"/>
+            <a:ext cx="0" cy="1086028"/>
+          </a:xfrm>
+          <a:prstGeom prst="line">
+            <a:avLst/>
+          </a:prstGeom>
+        </p:spPr>
+        <p:style>
+          <a:lnRef idx="2">
+            <a:schemeClr val="dk1"/>
+          </a:lnRef>
+          <a:fillRef idx="0">
+            <a:schemeClr val="dk1"/>
+          </a:fillRef>
+          <a:effectRef idx="1">
+            <a:schemeClr val="dk1"/>
+          </a:effectRef>
+          <a:fontRef idx="minor">
+            <a:schemeClr val="tx1"/>
+          </a:fontRef>
+        </p:style>
+      </p:cxnSp>
+      <p:cxnSp>
+        <p:nvCxnSpPr>
+          <p:cNvPr id="12" name="直线连接符 11">
+            <a:extLst>
+              <a:ext uri="{FF2B5EF4-FFF2-40B4-BE49-F238E27FC236}">
+                <a16:creationId xmlns:a16="http://schemas.microsoft.com/office/drawing/2014/main" id="{73CD915B-4AE2-83C2-3999-28EEC5807132}"/>
+              </a:ext>
+            </a:extLst>
+          </p:cNvPr>
+          <p:cNvCxnSpPr>
+            <a:stCxn id="6" idx="3"/>
+            <a:endCxn id="7" idx="1"/>
+          </p:cNvCxnSpPr>
+          <p:nvPr/>
+        </p:nvCxnSpPr>
+        <p:spPr>
+          <a:xfrm>
+            <a:off x="3104707" y="3605944"/>
+            <a:ext cx="6308482" cy="0"/>
+          </a:xfrm>
+          <a:prstGeom prst="line">
+            <a:avLst/>
+          </a:prstGeom>
+        </p:spPr>
+        <p:style>
+          <a:lnRef idx="2">
+            <a:schemeClr val="dk1"/>
+          </a:lnRef>
+          <a:fillRef idx="0">
+            <a:schemeClr val="dk1"/>
+          </a:fillRef>
+          <a:effectRef idx="1">
+            <a:schemeClr val="dk1"/>
+          </a:effectRef>
+          <a:fontRef idx="minor">
+            <a:schemeClr val="tx1"/>
+          </a:fontRef>
+        </p:style>
+      </p:cxnSp>
     </p:spTree>
     <p:extLst>
       <p:ext uri="{BB962C8B-B14F-4D97-AF65-F5344CB8AC3E}">
